--- a/docs/presentacion_ejecutiva.pptx
+++ b/docs/presentacion_ejecutiva.pptx
@@ -6419,6 +6419,41 @@
           </a:graphicData>
         </a:graphic>
       </p:graphicFrame>
+      <p:sp>
+        <p:nvSpPr>
+          <p:cNvPr id="14" name="TextBox 13"/>
+          <p:cNvSpPr txBox="1"/>
+          <p:nvPr/>
+        </p:nvSpPr>
+        <p:spPr>
+          <a:xfrm>
+            <a:off x="731520" y="6035040"/>
+            <a:ext cx="10698480" cy="365760"/>
+          </a:xfrm>
+          <a:prstGeom prst="rect">
+            <a:avLst/>
+          </a:prstGeom>
+          <a:noFill/>
+        </p:spPr>
+        <p:txBody>
+          <a:bodyPr wrap="none">
+            <a:spAutoFit/>
+          </a:bodyPr>
+          <a:lstStyle/>
+          <a:p>
+            <a:pPr>
+              <a:defRPr sz="950" i="1">
+                <a:solidFill>
+                  <a:srgbClr val="6B6B6B"/>
+                </a:solidFill>
+              </a:defRPr>
+            </a:pPr>
+            <a:r>
+              <a:t>* Nota de auditoría: La suma de causales (19) difiere del total de facturas físicas con discrepancia (18) porque la factura FAC-0042 presenta dos inconsistencias simultáneas (sin asiento contable y fecha de factura vacía).</a:t>
+            </a:r>
+          </a:p>
+        </p:txBody>
+      </p:sp>
     </p:spTree>
   </p:cSld>
   <p:clrMapOvr>

--- a/docs/presentacion_ejecutiva.pptx
+++ b/docs/presentacion_ejecutiva.pptx
@@ -5,14 +5,14 @@
     <p:sldMasterId id="2147483648" r:id="rId1"/>
   </p:sldMasterIdLst>
   <p:sldIdLst>
-    <p:sldId id="256" r:id="rId7"/>
-    <p:sldId id="257" r:id="rId8"/>
-    <p:sldId id="258" r:id="rId9"/>
-    <p:sldId id="259" r:id="rId10"/>
-    <p:sldId id="260" r:id="rId11"/>
-    <p:sldId id="261" r:id="rId12"/>
+    <p:sldId id="256" r:id="rId2"/>
+    <p:sldId id="257" r:id="rId3"/>
+    <p:sldId id="258" r:id="rId4"/>
+    <p:sldId id="259" r:id="rId5"/>
+    <p:sldId id="260" r:id="rId6"/>
+    <p:sldId id="261" r:id="rId7"/>
   </p:sldIdLst>
-  <p:sldSz cx="12191695" cy="6858000" type="screen4x3"/>
+  <p:sldSz cx="12192000" cy="6858000"/>
   <p:notesSz cx="6858000" cy="9144000"/>
   <p:defaultTextStyle>
     <a:defPPr>
@@ -109,6 +109,22 @@
       </a:defRPr>
     </a:lvl9pPr>
   </p:defaultTextStyle>
+  <p:extLst>
+    <p:ext uri="{EFAFB233-063F-42B5-8137-9DF3F51BA10A}">
+      <p15:sldGuideLst xmlns:p15="http://schemas.microsoft.com/office/powerpoint/2012/main">
+        <p15:guide id="1" orient="horz" pos="2160">
+          <p15:clr>
+            <a:srgbClr val="A4A3A4"/>
+          </p15:clr>
+        </p15:guide>
+        <p15:guide id="2" pos="2880">
+          <p15:clr>
+            <a:srgbClr val="A4A3A4"/>
+          </p15:clr>
+        </p15:guide>
+      </p15:sldGuideLst>
+    </p:ext>
+  </p:extLst>
 </p:presentation>
 </file>
 
@@ -150,10 +166,9 @@
           <a:lstStyle/>
           <a:p>
             <a:r>
-              <a:rPr lang="en-US" smtClean="0"/>
+              <a:rPr lang="en-US"/>
               <a:t>Click to edit Master title style</a:t>
             </a:r>
-            <a:endParaRPr lang="en-US"/>
           </a:p>
         </p:txBody>
       </p:sp>
@@ -269,10 +284,9 @@
           </a:lstStyle>
           <a:p>
             <a:r>
-              <a:rPr lang="en-US" smtClean="0"/>
+              <a:rPr lang="en-US"/>
               <a:t>Click to edit Master subtitle style</a:t>
             </a:r>
-            <a:endParaRPr lang="en-US"/>
           </a:p>
         </p:txBody>
       </p:sp>
@@ -293,7 +307,7 @@
           <a:p>
             <a:fld id="{5BCAD085-E8A6-8845-BD4E-CB4CCA059FC4}" type="datetimeFigureOut">
               <a:rPr lang="en-US" smtClean="0"/>
-              <a:t>1/27/13</a:t>
+              <a:t>10/16/2026</a:t>
             </a:fld>
             <a:endParaRPr lang="en-US"/>
           </a:p>
@@ -335,7 +349,7 @@
           <a:p>
             <a:fld id="{C1FF6DA9-008F-8B48-92A6-B652298478BF}" type="slidenum">
               <a:rPr lang="en-US" smtClean="0"/>
-              <a:t>‹#›</a:t>
+              <a:t>‹Nº›</a:t>
             </a:fld>
             <a:endParaRPr lang="en-US"/>
           </a:p>
@@ -387,10 +401,9 @@
           <a:lstStyle/>
           <a:p>
             <a:r>
-              <a:rPr lang="en-US" smtClean="0"/>
+              <a:rPr lang="en-US"/>
               <a:t>Click to edit Master title style</a:t>
             </a:r>
-            <a:endParaRPr lang="en-US"/>
           </a:p>
         </p:txBody>
       </p:sp>
@@ -411,38 +424,37 @@
           <a:p>
             <a:pPr lvl="0"/>
             <a:r>
-              <a:rPr lang="en-US" smtClean="0"/>
+              <a:rPr lang="en-US"/>
               <a:t>Click to edit Master text styles</a:t>
             </a:r>
           </a:p>
           <a:p>
             <a:pPr lvl="1"/>
             <a:r>
-              <a:rPr lang="en-US" smtClean="0"/>
+              <a:rPr lang="en-US"/>
               <a:t>Second level</a:t>
             </a:r>
           </a:p>
           <a:p>
             <a:pPr lvl="2"/>
             <a:r>
-              <a:rPr lang="en-US" smtClean="0"/>
+              <a:rPr lang="en-US"/>
               <a:t>Third level</a:t>
             </a:r>
           </a:p>
           <a:p>
             <a:pPr lvl="3"/>
             <a:r>
-              <a:rPr lang="en-US" smtClean="0"/>
+              <a:rPr lang="en-US"/>
               <a:t>Fourth level</a:t>
             </a:r>
           </a:p>
           <a:p>
             <a:pPr lvl="4"/>
             <a:r>
-              <a:rPr lang="en-US" smtClean="0"/>
+              <a:rPr lang="en-US"/>
               <a:t>Fifth level</a:t>
             </a:r>
-            <a:endParaRPr lang="en-US"/>
           </a:p>
         </p:txBody>
       </p:sp>
@@ -463,7 +475,7 @@
           <a:p>
             <a:fld id="{5BCAD085-E8A6-8845-BD4E-CB4CCA059FC4}" type="datetimeFigureOut">
               <a:rPr lang="en-US" smtClean="0"/>
-              <a:t>1/27/13</a:t>
+              <a:t>10/16/2026</a:t>
             </a:fld>
             <a:endParaRPr lang="en-US"/>
           </a:p>
@@ -505,7 +517,7 @@
           <a:p>
             <a:fld id="{C1FF6DA9-008F-8B48-92A6-B652298478BF}" type="slidenum">
               <a:rPr lang="en-US" smtClean="0"/>
-              <a:t>‹#›</a:t>
+              <a:t>‹Nº›</a:t>
             </a:fld>
             <a:endParaRPr lang="en-US"/>
           </a:p>
@@ -562,10 +574,9 @@
           <a:lstStyle/>
           <a:p>
             <a:r>
-              <a:rPr lang="en-US" smtClean="0"/>
+              <a:rPr lang="en-US"/>
               <a:t>Click to edit Master title style</a:t>
             </a:r>
-            <a:endParaRPr lang="en-US"/>
           </a:p>
         </p:txBody>
       </p:sp>
@@ -591,38 +602,37 @@
           <a:p>
             <a:pPr lvl="0"/>
             <a:r>
-              <a:rPr lang="en-US" smtClean="0"/>
+              <a:rPr lang="en-US"/>
               <a:t>Click to edit Master text styles</a:t>
             </a:r>
           </a:p>
           <a:p>
             <a:pPr lvl="1"/>
             <a:r>
-              <a:rPr lang="en-US" smtClean="0"/>
+              <a:rPr lang="en-US"/>
               <a:t>Second level</a:t>
             </a:r>
           </a:p>
           <a:p>
             <a:pPr lvl="2"/>
             <a:r>
-              <a:rPr lang="en-US" smtClean="0"/>
+              <a:rPr lang="en-US"/>
               <a:t>Third level</a:t>
             </a:r>
           </a:p>
           <a:p>
             <a:pPr lvl="3"/>
             <a:r>
-              <a:rPr lang="en-US" smtClean="0"/>
+              <a:rPr lang="en-US"/>
               <a:t>Fourth level</a:t>
             </a:r>
           </a:p>
           <a:p>
             <a:pPr lvl="4"/>
             <a:r>
-              <a:rPr lang="en-US" smtClean="0"/>
+              <a:rPr lang="en-US"/>
               <a:t>Fifth level</a:t>
             </a:r>
-            <a:endParaRPr lang="en-US"/>
           </a:p>
         </p:txBody>
       </p:sp>
@@ -643,7 +653,7 @@
           <a:p>
             <a:fld id="{5BCAD085-E8A6-8845-BD4E-CB4CCA059FC4}" type="datetimeFigureOut">
               <a:rPr lang="en-US" smtClean="0"/>
-              <a:t>1/27/13</a:t>
+              <a:t>10/16/2026</a:t>
             </a:fld>
             <a:endParaRPr lang="en-US"/>
           </a:p>
@@ -685,7 +695,7 @@
           <a:p>
             <a:fld id="{C1FF6DA9-008F-8B48-92A6-B652298478BF}" type="slidenum">
               <a:rPr lang="en-US" smtClean="0"/>
-              <a:t>‹#›</a:t>
+              <a:t>‹Nº›</a:t>
             </a:fld>
             <a:endParaRPr lang="en-US"/>
           </a:p>
@@ -737,10 +747,9 @@
           <a:lstStyle/>
           <a:p>
             <a:r>
-              <a:rPr lang="en-US" smtClean="0"/>
+              <a:rPr lang="en-US"/>
               <a:t>Click to edit Master title style</a:t>
             </a:r>
-            <a:endParaRPr lang="en-US"/>
           </a:p>
         </p:txBody>
       </p:sp>
@@ -761,38 +770,37 @@
           <a:p>
             <a:pPr lvl="0"/>
             <a:r>
-              <a:rPr lang="en-US" smtClean="0"/>
+              <a:rPr lang="en-US"/>
               <a:t>Click to edit Master text styles</a:t>
             </a:r>
           </a:p>
           <a:p>
             <a:pPr lvl="1"/>
             <a:r>
-              <a:rPr lang="en-US" smtClean="0"/>
+              <a:rPr lang="en-US"/>
               <a:t>Second level</a:t>
             </a:r>
           </a:p>
           <a:p>
             <a:pPr lvl="2"/>
             <a:r>
-              <a:rPr lang="en-US" smtClean="0"/>
+              <a:rPr lang="en-US"/>
               <a:t>Third level</a:t>
             </a:r>
           </a:p>
           <a:p>
             <a:pPr lvl="3"/>
             <a:r>
-              <a:rPr lang="en-US" smtClean="0"/>
+              <a:rPr lang="en-US"/>
               <a:t>Fourth level</a:t>
             </a:r>
           </a:p>
           <a:p>
             <a:pPr lvl="4"/>
             <a:r>
-              <a:rPr lang="en-US" smtClean="0"/>
+              <a:rPr lang="en-US"/>
               <a:t>Fifth level</a:t>
             </a:r>
-            <a:endParaRPr lang="en-US"/>
           </a:p>
         </p:txBody>
       </p:sp>
@@ -813,7 +821,7 @@
           <a:p>
             <a:fld id="{5BCAD085-E8A6-8845-BD4E-CB4CCA059FC4}" type="datetimeFigureOut">
               <a:rPr lang="en-US" smtClean="0"/>
-              <a:t>1/27/13</a:t>
+              <a:t>10/16/2026</a:t>
             </a:fld>
             <a:endParaRPr lang="en-US"/>
           </a:p>
@@ -855,7 +863,7 @@
           <a:p>
             <a:fld id="{C1FF6DA9-008F-8B48-92A6-B652298478BF}" type="slidenum">
               <a:rPr lang="en-US" smtClean="0"/>
-              <a:t>‹#›</a:t>
+              <a:t>‹Nº›</a:t>
             </a:fld>
             <a:endParaRPr lang="en-US"/>
           </a:p>
@@ -916,10 +924,9 @@
           </a:lstStyle>
           <a:p>
             <a:r>
-              <a:rPr lang="en-US" smtClean="0"/>
+              <a:rPr lang="en-US"/>
               <a:t>Click to edit Master title style</a:t>
             </a:r>
-            <a:endParaRPr lang="en-US"/>
           </a:p>
         </p:txBody>
       </p:sp>
@@ -1036,7 +1043,7 @@
           <a:p>
             <a:pPr lvl="0"/>
             <a:r>
-              <a:rPr lang="en-US" smtClean="0"/>
+              <a:rPr lang="en-US"/>
               <a:t>Click to edit Master text styles</a:t>
             </a:r>
           </a:p>
@@ -1059,7 +1066,7 @@
           <a:p>
             <a:fld id="{5BCAD085-E8A6-8845-BD4E-CB4CCA059FC4}" type="datetimeFigureOut">
               <a:rPr lang="en-US" smtClean="0"/>
-              <a:t>1/27/13</a:t>
+              <a:t>10/16/2026</a:t>
             </a:fld>
             <a:endParaRPr lang="en-US"/>
           </a:p>
@@ -1101,7 +1108,7 @@
           <a:p>
             <a:fld id="{C1FF6DA9-008F-8B48-92A6-B652298478BF}" type="slidenum">
               <a:rPr lang="en-US" smtClean="0"/>
-              <a:t>‹#›</a:t>
+              <a:t>‹Nº›</a:t>
             </a:fld>
             <a:endParaRPr lang="en-US"/>
           </a:p>
@@ -1153,10 +1160,9 @@
           <a:lstStyle/>
           <a:p>
             <a:r>
-              <a:rPr lang="en-US" smtClean="0"/>
+              <a:rPr lang="en-US"/>
               <a:t>Click to edit Master title style</a:t>
             </a:r>
-            <a:endParaRPr lang="en-US"/>
           </a:p>
         </p:txBody>
       </p:sp>
@@ -1210,38 +1216,37 @@
           <a:p>
             <a:pPr lvl="0"/>
             <a:r>
-              <a:rPr lang="en-US" smtClean="0"/>
+              <a:rPr lang="en-US"/>
               <a:t>Click to edit Master text styles</a:t>
             </a:r>
           </a:p>
           <a:p>
             <a:pPr lvl="1"/>
             <a:r>
-              <a:rPr lang="en-US" smtClean="0"/>
+              <a:rPr lang="en-US"/>
               <a:t>Second level</a:t>
             </a:r>
           </a:p>
           <a:p>
             <a:pPr lvl="2"/>
             <a:r>
-              <a:rPr lang="en-US" smtClean="0"/>
+              <a:rPr lang="en-US"/>
               <a:t>Third level</a:t>
             </a:r>
           </a:p>
           <a:p>
             <a:pPr lvl="3"/>
             <a:r>
-              <a:rPr lang="en-US" smtClean="0"/>
+              <a:rPr lang="en-US"/>
               <a:t>Fourth level</a:t>
             </a:r>
           </a:p>
           <a:p>
             <a:pPr lvl="4"/>
             <a:r>
-              <a:rPr lang="en-US" smtClean="0"/>
+              <a:rPr lang="en-US"/>
               <a:t>Fifth level</a:t>
             </a:r>
-            <a:endParaRPr lang="en-US"/>
           </a:p>
         </p:txBody>
       </p:sp>
@@ -1295,38 +1300,37 @@
           <a:p>
             <a:pPr lvl="0"/>
             <a:r>
-              <a:rPr lang="en-US" smtClean="0"/>
+              <a:rPr lang="en-US"/>
               <a:t>Click to edit Master text styles</a:t>
             </a:r>
           </a:p>
           <a:p>
             <a:pPr lvl="1"/>
             <a:r>
-              <a:rPr lang="en-US" smtClean="0"/>
+              <a:rPr lang="en-US"/>
               <a:t>Second level</a:t>
             </a:r>
           </a:p>
           <a:p>
             <a:pPr lvl="2"/>
             <a:r>
-              <a:rPr lang="en-US" smtClean="0"/>
+              <a:rPr lang="en-US"/>
               <a:t>Third level</a:t>
             </a:r>
           </a:p>
           <a:p>
             <a:pPr lvl="3"/>
             <a:r>
-              <a:rPr lang="en-US" smtClean="0"/>
+              <a:rPr lang="en-US"/>
               <a:t>Fourth level</a:t>
             </a:r>
           </a:p>
           <a:p>
             <a:pPr lvl="4"/>
             <a:r>
-              <a:rPr lang="en-US" smtClean="0"/>
+              <a:rPr lang="en-US"/>
               <a:t>Fifth level</a:t>
             </a:r>
-            <a:endParaRPr lang="en-US"/>
           </a:p>
         </p:txBody>
       </p:sp>
@@ -1347,7 +1351,7 @@
           <a:p>
             <a:fld id="{5BCAD085-E8A6-8845-BD4E-CB4CCA059FC4}" type="datetimeFigureOut">
               <a:rPr lang="en-US" smtClean="0"/>
-              <a:t>1/27/13</a:t>
+              <a:t>10/16/2026</a:t>
             </a:fld>
             <a:endParaRPr lang="en-US"/>
           </a:p>
@@ -1389,7 +1393,7 @@
           <a:p>
             <a:fld id="{C1FF6DA9-008F-8B48-92A6-B652298478BF}" type="slidenum">
               <a:rPr lang="en-US" smtClean="0"/>
-              <a:t>‹#›</a:t>
+              <a:t>‹Nº›</a:t>
             </a:fld>
             <a:endParaRPr lang="en-US"/>
           </a:p>
@@ -1445,10 +1449,9 @@
           </a:lstStyle>
           <a:p>
             <a:r>
-              <a:rPr lang="en-US" smtClean="0"/>
+              <a:rPr lang="en-US"/>
               <a:t>Click to edit Master title style</a:t>
             </a:r>
-            <a:endParaRPr lang="en-US"/>
           </a:p>
         </p:txBody>
       </p:sp>
@@ -1511,7 +1514,7 @@
           <a:p>
             <a:pPr lvl="0"/>
             <a:r>
-              <a:rPr lang="en-US" smtClean="0"/>
+              <a:rPr lang="en-US"/>
               <a:t>Click to edit Master text styles</a:t>
             </a:r>
           </a:p>
@@ -1567,38 +1570,37 @@
           <a:p>
             <a:pPr lvl="0"/>
             <a:r>
-              <a:rPr lang="en-US" smtClean="0"/>
+              <a:rPr lang="en-US"/>
               <a:t>Click to edit Master text styles</a:t>
             </a:r>
           </a:p>
           <a:p>
             <a:pPr lvl="1"/>
             <a:r>
-              <a:rPr lang="en-US" smtClean="0"/>
+              <a:rPr lang="en-US"/>
               <a:t>Second level</a:t>
             </a:r>
           </a:p>
           <a:p>
             <a:pPr lvl="2"/>
             <a:r>
-              <a:rPr lang="en-US" smtClean="0"/>
+              <a:rPr lang="en-US"/>
               <a:t>Third level</a:t>
             </a:r>
           </a:p>
           <a:p>
             <a:pPr lvl="3"/>
             <a:r>
-              <a:rPr lang="en-US" smtClean="0"/>
+              <a:rPr lang="en-US"/>
               <a:t>Fourth level</a:t>
             </a:r>
           </a:p>
           <a:p>
             <a:pPr lvl="4"/>
             <a:r>
-              <a:rPr lang="en-US" smtClean="0"/>
+              <a:rPr lang="en-US"/>
               <a:t>Fifth level</a:t>
             </a:r>
-            <a:endParaRPr lang="en-US"/>
           </a:p>
         </p:txBody>
       </p:sp>
@@ -1661,7 +1663,7 @@
           <a:p>
             <a:pPr lvl="0"/>
             <a:r>
-              <a:rPr lang="en-US" smtClean="0"/>
+              <a:rPr lang="en-US"/>
               <a:t>Click to edit Master text styles</a:t>
             </a:r>
           </a:p>
@@ -1717,38 +1719,37 @@
           <a:p>
             <a:pPr lvl="0"/>
             <a:r>
-              <a:rPr lang="en-US" smtClean="0"/>
+              <a:rPr lang="en-US"/>
               <a:t>Click to edit Master text styles</a:t>
             </a:r>
           </a:p>
           <a:p>
             <a:pPr lvl="1"/>
             <a:r>
-              <a:rPr lang="en-US" smtClean="0"/>
+              <a:rPr lang="en-US"/>
               <a:t>Second level</a:t>
             </a:r>
           </a:p>
           <a:p>
             <a:pPr lvl="2"/>
             <a:r>
-              <a:rPr lang="en-US" smtClean="0"/>
+              <a:rPr lang="en-US"/>
               <a:t>Third level</a:t>
             </a:r>
           </a:p>
           <a:p>
             <a:pPr lvl="3"/>
             <a:r>
-              <a:rPr lang="en-US" smtClean="0"/>
+              <a:rPr lang="en-US"/>
               <a:t>Fourth level</a:t>
             </a:r>
           </a:p>
           <a:p>
             <a:pPr lvl="4"/>
             <a:r>
-              <a:rPr lang="en-US" smtClean="0"/>
+              <a:rPr lang="en-US"/>
               <a:t>Fifth level</a:t>
             </a:r>
-            <a:endParaRPr lang="en-US"/>
           </a:p>
         </p:txBody>
       </p:sp>
@@ -1769,7 +1770,7 @@
           <a:p>
             <a:fld id="{5BCAD085-E8A6-8845-BD4E-CB4CCA059FC4}" type="datetimeFigureOut">
               <a:rPr lang="en-US" smtClean="0"/>
-              <a:t>1/27/13</a:t>
+              <a:t>10/16/2026</a:t>
             </a:fld>
             <a:endParaRPr lang="en-US"/>
           </a:p>
@@ -1811,7 +1812,7 @@
           <a:p>
             <a:fld id="{C1FF6DA9-008F-8B48-92A6-B652298478BF}" type="slidenum">
               <a:rPr lang="en-US" smtClean="0"/>
-              <a:t>‹#›</a:t>
+              <a:t>‹Nº›</a:t>
             </a:fld>
             <a:endParaRPr lang="en-US"/>
           </a:p>
@@ -1863,10 +1864,9 @@
           <a:lstStyle/>
           <a:p>
             <a:r>
-              <a:rPr lang="en-US" smtClean="0"/>
+              <a:rPr lang="en-US"/>
               <a:t>Click to edit Master title style</a:t>
             </a:r>
-            <a:endParaRPr lang="en-US"/>
           </a:p>
         </p:txBody>
       </p:sp>
@@ -1887,7 +1887,7 @@
           <a:p>
             <a:fld id="{5BCAD085-E8A6-8845-BD4E-CB4CCA059FC4}" type="datetimeFigureOut">
               <a:rPr lang="en-US" smtClean="0"/>
-              <a:t>1/27/13</a:t>
+              <a:t>10/16/2026</a:t>
             </a:fld>
             <a:endParaRPr lang="en-US"/>
           </a:p>
@@ -1929,7 +1929,7 @@
           <a:p>
             <a:fld id="{C1FF6DA9-008F-8B48-92A6-B652298478BF}" type="slidenum">
               <a:rPr lang="en-US" smtClean="0"/>
-              <a:t>‹#›</a:t>
+              <a:t>‹Nº›</a:t>
             </a:fld>
             <a:endParaRPr lang="en-US"/>
           </a:p>
@@ -1982,7 +1982,7 @@
           <a:p>
             <a:fld id="{5BCAD085-E8A6-8845-BD4E-CB4CCA059FC4}" type="datetimeFigureOut">
               <a:rPr lang="en-US" smtClean="0"/>
-              <a:t>1/27/13</a:t>
+              <a:t>10/16/2026</a:t>
             </a:fld>
             <a:endParaRPr lang="en-US"/>
           </a:p>
@@ -2024,7 +2024,7 @@
           <a:p>
             <a:fld id="{C1FF6DA9-008F-8B48-92A6-B652298478BF}" type="slidenum">
               <a:rPr lang="en-US" smtClean="0"/>
-              <a:t>‹#›</a:t>
+              <a:t>‹Nº›</a:t>
             </a:fld>
             <a:endParaRPr lang="en-US"/>
           </a:p>
@@ -2085,10 +2085,9 @@
           </a:lstStyle>
           <a:p>
             <a:r>
-              <a:rPr lang="en-US" smtClean="0"/>
+              <a:rPr lang="en-US"/>
               <a:t>Click to edit Master title style</a:t>
             </a:r>
-            <a:endParaRPr lang="en-US"/>
           </a:p>
         </p:txBody>
       </p:sp>
@@ -2142,38 +2141,37 @@
           <a:p>
             <a:pPr lvl="0"/>
             <a:r>
-              <a:rPr lang="en-US" smtClean="0"/>
+              <a:rPr lang="en-US"/>
               <a:t>Click to edit Master text styles</a:t>
             </a:r>
           </a:p>
           <a:p>
             <a:pPr lvl="1"/>
             <a:r>
-              <a:rPr lang="en-US" smtClean="0"/>
+              <a:rPr lang="en-US"/>
               <a:t>Second level</a:t>
             </a:r>
           </a:p>
           <a:p>
             <a:pPr lvl="2"/>
             <a:r>
-              <a:rPr lang="en-US" smtClean="0"/>
+              <a:rPr lang="en-US"/>
               <a:t>Third level</a:t>
             </a:r>
           </a:p>
           <a:p>
             <a:pPr lvl="3"/>
             <a:r>
-              <a:rPr lang="en-US" smtClean="0"/>
+              <a:rPr lang="en-US"/>
               <a:t>Fourth level</a:t>
             </a:r>
           </a:p>
           <a:p>
             <a:pPr lvl="4"/>
             <a:r>
-              <a:rPr lang="en-US" smtClean="0"/>
+              <a:rPr lang="en-US"/>
               <a:t>Fifth level</a:t>
             </a:r>
-            <a:endParaRPr lang="en-US"/>
           </a:p>
         </p:txBody>
       </p:sp>
@@ -2236,7 +2234,7 @@
           <a:p>
             <a:pPr lvl="0"/>
             <a:r>
-              <a:rPr lang="en-US" smtClean="0"/>
+              <a:rPr lang="en-US"/>
               <a:t>Click to edit Master text styles</a:t>
             </a:r>
           </a:p>
@@ -2259,7 +2257,7 @@
           <a:p>
             <a:fld id="{5BCAD085-E8A6-8845-BD4E-CB4CCA059FC4}" type="datetimeFigureOut">
               <a:rPr lang="en-US" smtClean="0"/>
-              <a:t>1/27/13</a:t>
+              <a:t>10/16/2026</a:t>
             </a:fld>
             <a:endParaRPr lang="en-US"/>
           </a:p>
@@ -2301,7 +2299,7 @@
           <a:p>
             <a:fld id="{C1FF6DA9-008F-8B48-92A6-B652298478BF}" type="slidenum">
               <a:rPr lang="en-US" smtClean="0"/>
-              <a:t>‹#›</a:t>
+              <a:t>‹Nº›</a:t>
             </a:fld>
             <a:endParaRPr lang="en-US"/>
           </a:p>
@@ -2362,10 +2360,9 @@
           </a:lstStyle>
           <a:p>
             <a:r>
-              <a:rPr lang="en-US" smtClean="0"/>
+              <a:rPr lang="en-US"/>
               <a:t>Click to edit Master title style</a:t>
             </a:r>
-            <a:endParaRPr lang="en-US"/>
           </a:p>
         </p:txBody>
       </p:sp>
@@ -2489,7 +2486,7 @@
           <a:p>
             <a:pPr lvl="0"/>
             <a:r>
-              <a:rPr lang="en-US" smtClean="0"/>
+              <a:rPr lang="en-US"/>
               <a:t>Click to edit Master text styles</a:t>
             </a:r>
           </a:p>
@@ -2512,7 +2509,7 @@
           <a:p>
             <a:fld id="{5BCAD085-E8A6-8845-BD4E-CB4CCA059FC4}" type="datetimeFigureOut">
               <a:rPr lang="en-US" smtClean="0"/>
-              <a:t>1/27/13</a:t>
+              <a:t>10/16/2026</a:t>
             </a:fld>
             <a:endParaRPr lang="en-US"/>
           </a:p>
@@ -2554,7 +2551,7 @@
           <a:p>
             <a:fld id="{C1FF6DA9-008F-8B48-92A6-B652298478BF}" type="slidenum">
               <a:rPr lang="en-US" smtClean="0"/>
-              <a:t>‹#›</a:t>
+              <a:t>‹Nº›</a:t>
             </a:fld>
             <a:endParaRPr lang="en-US"/>
           </a:p>
@@ -2621,10 +2618,9 @@
           <a:lstStyle/>
           <a:p>
             <a:r>
-              <a:rPr lang="en-US" smtClean="0"/>
+              <a:rPr lang="en-US"/>
               <a:t>Click to edit Master title style</a:t>
             </a:r>
-            <a:endParaRPr lang="en-US"/>
           </a:p>
         </p:txBody>
       </p:sp>
@@ -2655,38 +2651,37 @@
           <a:p>
             <a:pPr lvl="0"/>
             <a:r>
-              <a:rPr lang="en-US" smtClean="0"/>
+              <a:rPr lang="en-US"/>
               <a:t>Click to edit Master text styles</a:t>
             </a:r>
           </a:p>
           <a:p>
             <a:pPr lvl="1"/>
             <a:r>
-              <a:rPr lang="en-US" smtClean="0"/>
+              <a:rPr lang="en-US"/>
               <a:t>Second level</a:t>
             </a:r>
           </a:p>
           <a:p>
             <a:pPr lvl="2"/>
             <a:r>
-              <a:rPr lang="en-US" smtClean="0"/>
+              <a:rPr lang="en-US"/>
               <a:t>Third level</a:t>
             </a:r>
           </a:p>
           <a:p>
             <a:pPr lvl="3"/>
             <a:r>
-              <a:rPr lang="en-US" smtClean="0"/>
+              <a:rPr lang="en-US"/>
               <a:t>Fourth level</a:t>
             </a:r>
           </a:p>
           <a:p>
             <a:pPr lvl="4"/>
             <a:r>
-              <a:rPr lang="en-US" smtClean="0"/>
+              <a:rPr lang="en-US"/>
               <a:t>Fifth level</a:t>
             </a:r>
-            <a:endParaRPr lang="en-US"/>
           </a:p>
         </p:txBody>
       </p:sp>
@@ -2725,7 +2720,7 @@
           <a:p>
             <a:fld id="{5BCAD085-E8A6-8845-BD4E-CB4CCA059FC4}" type="datetimeFigureOut">
               <a:rPr lang="en-US" smtClean="0"/>
-              <a:t>1/27/13</a:t>
+              <a:t>10/16/2026</a:t>
             </a:fld>
             <a:endParaRPr lang="en-US"/>
           </a:p>
@@ -2803,7 +2798,7 @@
           <a:p>
             <a:fld id="{C1FF6DA9-008F-8B48-92A6-B652298478BF}" type="slidenum">
               <a:rPr lang="en-US" smtClean="0"/>
-              <a:t>‹#›</a:t>
+              <a:t>‹Nº›</a:t>
             </a:fld>
             <a:endParaRPr lang="en-US"/>
           </a:p>
@@ -3084,7 +3079,7 @@
 </file>
 
 <file path=ppt/slides/slide1.xml><?xml version="1.0" encoding="utf-8"?>
-<p:sld xmlns:a="http://schemas.openxmlformats.org/drawingml/2006/main" xmlns:p="http://schemas.openxmlformats.org/presentationml/2006/main" xmlns:r="http://schemas.openxmlformats.org/officeDocument/2006/relationships">
+<p:sld xmlns:a="http://schemas.openxmlformats.org/drawingml/2006/main" xmlns:r="http://schemas.openxmlformats.org/officeDocument/2006/relationships" xmlns:p="http://schemas.openxmlformats.org/presentationml/2006/main">
   <p:cSld>
     <p:spTree>
       <p:nvGrpSpPr>
@@ -3092,7 +3087,14 @@
         <p:cNvGrpSpPr/>
         <p:nvPr/>
       </p:nvGrpSpPr>
-      <p:grpSpPr/>
+      <p:grpSpPr>
+        <a:xfrm>
+          <a:off x="0" y="0"/>
+          <a:ext cx="0" cy="0"/>
+          <a:chOff x="0" y="0"/>
+          <a:chExt cx="0" cy="0"/>
+        </a:xfrm>
+      </p:grpSpPr>
       <p:sp>
         <p:nvSpPr>
           <p:cNvPr id="2" name="Rectangle 1"/>
@@ -3133,6 +3135,7 @@
           <a:lstStyle/>
           <a:p>
             <a:pPr algn="ctr"/>
+            <a:endParaRPr/>
           </a:p>
         </p:txBody>
       </p:sp>
@@ -3176,6 +3179,7 @@
           <a:lstStyle/>
           <a:p>
             <a:pPr algn="ctr"/>
+            <a:endParaRPr/>
           </a:p>
         </p:txBody>
       </p:sp>
@@ -3209,6 +3213,7 @@
               </a:defRPr>
             </a:pPr>
             <a:r>
+              <a:rPr dirty="0"/>
               <a:t>GERENCIA DE EVOLUCIÓN CONTABLE Y TRIBUTARIA</a:t>
             </a:r>
           </a:p>
@@ -3224,8 +3229,18 @@
               </a:defRPr>
             </a:pPr>
             <a:r>
-              <a:t>Conciliador de Facturas y Retenciones</a:t>
-            </a:r>
+              <a:rPr dirty="0" err="1"/>
+              <a:t>Conciliador</a:t>
+            </a:r>
+            <a:r>
+              <a:rPr dirty="0"/>
+              <a:t> de Facturas y </a:t>
+            </a:r>
+            <a:r>
+              <a:rPr dirty="0" err="1"/>
+              <a:t>Retenciones</a:t>
+            </a:r>
+            <a:endParaRPr dirty="0"/>
           </a:p>
           <a:p>
             <a:pPr>
@@ -3239,8 +3254,42 @@
               </a:defRPr>
             </a:pPr>
             <a:r>
-              <a:t>Automatización y Cruce Mensual entre Proveedores y Registros Contables</a:t>
-            </a:r>
+              <a:rPr dirty="0" err="1"/>
+              <a:t>Automatización</a:t>
+            </a:r>
+            <a:r>
+              <a:rPr dirty="0"/>
+              <a:t> y Cruce </a:t>
+            </a:r>
+            <a:r>
+              <a:rPr dirty="0" err="1"/>
+              <a:t>Mensual</a:t>
+            </a:r>
+            <a:r>
+              <a:rPr dirty="0"/>
+              <a:t> entre </a:t>
+            </a:r>
+            <a:r>
+              <a:rPr dirty="0" err="1"/>
+              <a:t>Proveedores</a:t>
+            </a:r>
+            <a:r>
+              <a:rPr dirty="0"/>
+              <a:t> y </a:t>
+            </a:r>
+            <a:r>
+              <a:rPr dirty="0" err="1"/>
+              <a:t>Registros</a:t>
+            </a:r>
+            <a:r>
+              <a:rPr dirty="0"/>
+              <a:t> </a:t>
+            </a:r>
+            <a:r>
+              <a:rPr dirty="0" err="1"/>
+              <a:t>Contables</a:t>
+            </a:r>
+            <a:endParaRPr dirty="0"/>
           </a:p>
           <a:p>
             <a:pPr>
@@ -3254,8 +3303,42 @@
               </a:defRPr>
             </a:pPr>
             <a:r>
-              <a:t>Prueba Técnica – Analista III · Prototipo Funcional de Alta Precisión</a:t>
-            </a:r>
+              <a:rPr dirty="0" err="1"/>
+              <a:t>Prueba</a:t>
+            </a:r>
+            <a:r>
+              <a:rPr dirty="0"/>
+              <a:t> Técnica – </a:t>
+            </a:r>
+            <a:r>
+              <a:rPr dirty="0" err="1"/>
+              <a:t>Analista</a:t>
+            </a:r>
+            <a:r>
+              <a:rPr dirty="0"/>
+              <a:t> III · </a:t>
+            </a:r>
+            <a:r>
+              <a:rPr dirty="0" err="1"/>
+              <a:t>Prototipo</a:t>
+            </a:r>
+            <a:r>
+              <a:rPr dirty="0"/>
+              <a:t> </a:t>
+            </a:r>
+            <a:r>
+              <a:rPr dirty="0" err="1"/>
+              <a:t>Funcional</a:t>
+            </a:r>
+            <a:r>
+              <a:rPr dirty="0"/>
+              <a:t> de Alta </a:t>
+            </a:r>
+            <a:r>
+              <a:rPr dirty="0" err="1"/>
+              <a:t>Precisión</a:t>
+            </a:r>
+            <a:endParaRPr dirty="0"/>
           </a:p>
         </p:txBody>
       </p:sp>
@@ -3268,7 +3351,7 @@
 </file>
 
 <file path=ppt/slides/slide2.xml><?xml version="1.0" encoding="utf-8"?>
-<p:sld xmlns:a="http://schemas.openxmlformats.org/drawingml/2006/main" xmlns:p="http://schemas.openxmlformats.org/presentationml/2006/main" xmlns:r="http://schemas.openxmlformats.org/officeDocument/2006/relationships">
+<p:sld xmlns:a="http://schemas.openxmlformats.org/drawingml/2006/main" xmlns:r="http://schemas.openxmlformats.org/officeDocument/2006/relationships" xmlns:p="http://schemas.openxmlformats.org/presentationml/2006/main">
   <p:cSld>
     <p:spTree>
       <p:nvGrpSpPr>
@@ -3276,7 +3359,14 @@
         <p:cNvGrpSpPr/>
         <p:nvPr/>
       </p:nvGrpSpPr>
-      <p:grpSpPr/>
+      <p:grpSpPr>
+        <a:xfrm>
+          <a:off x="0" y="0"/>
+          <a:ext cx="0" cy="0"/>
+          <a:chOff x="0" y="0"/>
+          <a:chExt cx="0" cy="0"/>
+        </a:xfrm>
+      </p:grpSpPr>
       <p:sp>
         <p:nvSpPr>
           <p:cNvPr id="2" name="Rectangle 1"/>
@@ -3317,6 +3407,7 @@
           <a:lstStyle/>
           <a:p>
             <a:pPr algn="ctr"/>
+            <a:endParaRPr/>
           </a:p>
         </p:txBody>
       </p:sp>
@@ -3360,6 +3451,7 @@
           <a:lstStyle/>
           <a:p>
             <a:pPr algn="ctr"/>
+            <a:endParaRPr/>
           </a:p>
         </p:txBody>
       </p:sp>
@@ -3403,6 +3495,7 @@
           <a:lstStyle/>
           <a:p>
             <a:pPr algn="ctr"/>
+            <a:endParaRPr/>
           </a:p>
         </p:txBody>
       </p:sp>
@@ -3530,6 +3623,7 @@
           <a:lstStyle/>
           <a:p>
             <a:pPr algn="ctr"/>
+            <a:endParaRPr/>
           </a:p>
         </p:txBody>
       </p:sp>
@@ -3594,7 +3688,7 @@
               <a:spcBef>
                 <a:spcPts val="0"/>
               </a:spcBef>
-              <a:defRPr b="1" sz="1200">
+              <a:defRPr sz="1200" b="1">
                 <a:solidFill>
                   <a:srgbClr val="C8102E"/>
                 </a:solidFill>
@@ -3617,7 +3711,7 @@
               <a:spcBef>
                 <a:spcPts val="800"/>
               </a:spcBef>
-              <a:defRPr b="1" sz="1200">
+              <a:defRPr sz="1200" b="1">
                 <a:solidFill>
                   <a:srgbClr val="C8102E"/>
                 </a:solidFill>
@@ -3640,7 +3734,7 @@
               <a:spcBef>
                 <a:spcPts val="800"/>
               </a:spcBef>
-              <a:defRPr b="1" sz="1200">
+              <a:defRPr sz="1200" b="1">
                 <a:solidFill>
                   <a:srgbClr val="C8102E"/>
                 </a:solidFill>
@@ -3663,7 +3757,7 @@
               <a:spcBef>
                 <a:spcPts val="800"/>
               </a:spcBef>
-              <a:defRPr b="1" sz="1200">
+              <a:defRPr sz="1200" b="1">
                 <a:solidFill>
                   <a:srgbClr val="C8102E"/>
                 </a:solidFill>
@@ -3725,6 +3819,7 @@
           <a:lstStyle/>
           <a:p>
             <a:pPr algn="ctr"/>
+            <a:endParaRPr/>
           </a:p>
         </p:txBody>
       </p:sp>
@@ -3772,7 +3867,7 @@
         <p:spPr>
           <a:xfrm>
             <a:off x="6400800" y="2148840"/>
-            <a:ext cx="4754880" cy="3749039"/>
+            <a:ext cx="4754880" cy="1877437"/>
           </a:xfrm>
           <a:prstGeom prst="rect">
             <a:avLst/>
@@ -3789,22 +3884,119 @@
               <a:spcBef>
                 <a:spcPts val="0"/>
               </a:spcBef>
-              <a:defRPr b="1" sz="1200">
+              <a:defRPr sz="1200" b="1">
                 <a:solidFill>
                   <a:srgbClr val="00875A"/>
                 </a:solidFill>
               </a:defRPr>
             </a:pPr>
             <a:r>
-              <a:t>✔  Conciliación Automatizada: </a:t>
-            </a:r>
-            <a:r>
-              <a:rPr b="0">
-                <a:solidFill>
-                  <a:srgbClr val="2C2A29"/>
-                </a:solidFill>
-              </a:rPr>
-              <a:t>Carga dual de facturas.csv y contabilidad.csv con procesamiento analítico en menos de 1 segundo.</a:t>
+              <a:rPr dirty="0"/>
+              <a:t>✔  </a:t>
+            </a:r>
+            <a:r>
+              <a:rPr dirty="0" err="1"/>
+              <a:t>Conciliación</a:t>
+            </a:r>
+            <a:r>
+              <a:rPr dirty="0"/>
+              <a:t> </a:t>
+            </a:r>
+            <a:r>
+              <a:rPr dirty="0" err="1"/>
+              <a:t>Automatizada</a:t>
+            </a:r>
+            <a:r>
+              <a:rPr dirty="0"/>
+              <a:t>: </a:t>
+            </a:r>
+            <a:r>
+              <a:rPr b="0" dirty="0">
+                <a:solidFill>
+                  <a:srgbClr val="2C2A29"/>
+                </a:solidFill>
+              </a:rPr>
+              <a:t>Carga dual de facturas.csv y contabilidad.csv con </a:t>
+            </a:r>
+            <a:r>
+              <a:rPr b="0" dirty="0" err="1">
+                <a:solidFill>
+                  <a:srgbClr val="2C2A29"/>
+                </a:solidFill>
+              </a:rPr>
+              <a:t>procesamiento</a:t>
+            </a:r>
+            <a:r>
+              <a:rPr b="0" dirty="0">
+                <a:solidFill>
+                  <a:srgbClr val="2C2A29"/>
+                </a:solidFill>
+              </a:rPr>
+              <a:t> </a:t>
+            </a:r>
+            <a:r>
+              <a:rPr b="0" dirty="0" err="1">
+                <a:solidFill>
+                  <a:srgbClr val="2C2A29"/>
+                </a:solidFill>
+              </a:rPr>
+              <a:t>analítico</a:t>
+            </a:r>
+            <a:r>
+              <a:rPr b="0" dirty="0">
+                <a:solidFill>
+                  <a:srgbClr val="2C2A29"/>
+                </a:solidFill>
+              </a:rPr>
+              <a:t> </a:t>
+            </a:r>
+            <a:r>
+              <a:rPr b="0" dirty="0" err="1">
+                <a:solidFill>
+                  <a:srgbClr val="2C2A29"/>
+                </a:solidFill>
+              </a:rPr>
+              <a:t>en</a:t>
+            </a:r>
+            <a:r>
+              <a:rPr b="0" dirty="0">
+                <a:solidFill>
+                  <a:srgbClr val="2C2A29"/>
+                </a:solidFill>
+              </a:rPr>
+              <a:t> </a:t>
+            </a:r>
+            <a:r>
+              <a:rPr b="0" dirty="0" err="1">
+                <a:solidFill>
+                  <a:srgbClr val="2C2A29"/>
+                </a:solidFill>
+              </a:rPr>
+              <a:t>menos</a:t>
+            </a:r>
+            <a:r>
+              <a:rPr b="0" dirty="0">
+                <a:solidFill>
+                  <a:srgbClr val="2C2A29"/>
+                </a:solidFill>
+              </a:rPr>
+              <a:t> de 1 </a:t>
+            </a:r>
+            <a:r>
+              <a:rPr b="0" dirty="0" err="1">
+                <a:solidFill>
+                  <a:srgbClr val="2C2A29"/>
+                </a:solidFill>
+              </a:rPr>
+              <a:t>segundo</a:t>
+            </a:r>
+            <a:r>
+              <a:rPr b="0" dirty="0">
+                <a:solidFill>
+                  <a:srgbClr val="2C2A29"/>
+                </a:solidFill>
+              </a:rPr>
+              <a:t>.</a:t>
             </a:r>
           </a:p>
           <a:p>
@@ -3812,22 +4004,175 @@
               <a:spcBef>
                 <a:spcPts val="800"/>
               </a:spcBef>
-              <a:defRPr b="1" sz="1200">
+              <a:defRPr sz="1200" b="1">
                 <a:solidFill>
                   <a:srgbClr val="00875A"/>
                 </a:solidFill>
               </a:defRPr>
             </a:pPr>
             <a:r>
-              <a:t>✔  Precisión Matemática Estricta: </a:t>
-            </a:r>
-            <a:r>
-              <a:rPr b="0">
-                <a:solidFill>
-                  <a:srgbClr val="2C2A29"/>
-                </a:solidFill>
-              </a:rPr>
-              <a:t>Uso exclusivo de Decimal y redondeo financiero ROUND_HALF_UP a dos decimales en todos los cálculos.</a:t>
+              <a:rPr dirty="0"/>
+              <a:t>✔  </a:t>
+            </a:r>
+            <a:r>
+              <a:rPr dirty="0" err="1"/>
+              <a:t>Precisión</a:t>
+            </a:r>
+            <a:r>
+              <a:rPr dirty="0"/>
+              <a:t> </a:t>
+            </a:r>
+            <a:r>
+              <a:rPr dirty="0" err="1"/>
+              <a:t>Matemática</a:t>
+            </a:r>
+            <a:r>
+              <a:rPr dirty="0"/>
+              <a:t> </a:t>
+            </a:r>
+            <a:r>
+              <a:rPr dirty="0" err="1"/>
+              <a:t>Estricta</a:t>
+            </a:r>
+            <a:r>
+              <a:rPr dirty="0"/>
+              <a:t>: </a:t>
+            </a:r>
+            <a:r>
+              <a:rPr b="0" dirty="0">
+                <a:solidFill>
+                  <a:srgbClr val="2C2A29"/>
+                </a:solidFill>
+              </a:rPr>
+              <a:t>Uso </a:t>
+            </a:r>
+            <a:r>
+              <a:rPr b="0" dirty="0" err="1">
+                <a:solidFill>
+                  <a:srgbClr val="2C2A29"/>
+                </a:solidFill>
+              </a:rPr>
+              <a:t>exclusivo</a:t>
+            </a:r>
+            <a:r>
+              <a:rPr b="0" dirty="0">
+                <a:solidFill>
+                  <a:srgbClr val="2C2A29"/>
+                </a:solidFill>
+              </a:rPr>
+              <a:t> de Decimal y </a:t>
+            </a:r>
+            <a:r>
+              <a:rPr b="0" dirty="0" err="1">
+                <a:solidFill>
+                  <a:srgbClr val="2C2A29"/>
+                </a:solidFill>
+              </a:rPr>
+              <a:t>redondeo</a:t>
+            </a:r>
+            <a:r>
+              <a:rPr b="0" dirty="0">
+                <a:solidFill>
+                  <a:srgbClr val="2C2A29"/>
+                </a:solidFill>
+              </a:rPr>
+              <a:t> </a:t>
+            </a:r>
+            <a:r>
+              <a:rPr b="0" dirty="0" err="1">
+                <a:solidFill>
+                  <a:srgbClr val="2C2A29"/>
+                </a:solidFill>
+              </a:rPr>
+              <a:t>financiero</a:t>
+            </a:r>
+            <a:r>
+              <a:rPr b="0" dirty="0">
+                <a:solidFill>
+                  <a:srgbClr val="2C2A29"/>
+                </a:solidFill>
+              </a:rPr>
+              <a:t> ROUND_HALF_UP a dos </a:t>
+            </a:r>
+            <a:r>
+              <a:rPr b="0" dirty="0" err="1">
+                <a:solidFill>
+                  <a:srgbClr val="2C2A29"/>
+                </a:solidFill>
+              </a:rPr>
+              <a:t>decimales</a:t>
+            </a:r>
+            <a:r>
+              <a:rPr b="0" dirty="0">
+                <a:solidFill>
+                  <a:srgbClr val="2C2A29"/>
+                </a:solidFill>
+              </a:rPr>
+              <a:t> </a:t>
+            </a:r>
+            <a:r>
+              <a:rPr b="0" dirty="0" err="1">
+                <a:solidFill>
+                  <a:srgbClr val="2C2A29"/>
+                </a:solidFill>
+              </a:rPr>
+              <a:t>en</a:t>
+            </a:r>
+            <a:r>
+              <a:rPr b="0" dirty="0">
+                <a:solidFill>
+                  <a:srgbClr val="2C2A29"/>
+                </a:solidFill>
+              </a:rPr>
+              <a:t> </a:t>
+            </a:r>
+            <a:r>
+              <a:rPr b="0" dirty="0" err="1">
+                <a:solidFill>
+                  <a:srgbClr val="2C2A29"/>
+                </a:solidFill>
+              </a:rPr>
+              <a:t>todos</a:t>
+            </a:r>
+            <a:r>
+              <a:rPr b="0" dirty="0">
+                <a:solidFill>
+                  <a:srgbClr val="2C2A29"/>
+                </a:solidFill>
+              </a:rPr>
+              <a:t> </a:t>
+            </a:r>
+            <a:r>
+              <a:rPr b="0" dirty="0" err="1">
+                <a:solidFill>
+                  <a:srgbClr val="2C2A29"/>
+                </a:solidFill>
+              </a:rPr>
+              <a:t>los</a:t>
+            </a:r>
+            <a:r>
+              <a:rPr b="0" dirty="0">
+                <a:solidFill>
+                  <a:srgbClr val="2C2A29"/>
+                </a:solidFill>
+              </a:rPr>
+              <a:t> </a:t>
+            </a:r>
+            <a:r>
+              <a:rPr b="0" dirty="0" err="1">
+                <a:solidFill>
+                  <a:srgbClr val="2C2A29"/>
+                </a:solidFill>
+              </a:rPr>
+              <a:t>cálculos</a:t>
+            </a:r>
+            <a:r>
+              <a:rPr b="0" dirty="0">
+                <a:solidFill>
+                  <a:srgbClr val="2C2A29"/>
+                </a:solidFill>
+              </a:rPr>
+              <a:t>.</a:t>
             </a:r>
           </a:p>
           <a:p>
@@ -3835,22 +4180,175 @@
               <a:spcBef>
                 <a:spcPts val="800"/>
               </a:spcBef>
-              <a:defRPr b="1" sz="1200">
+              <a:defRPr sz="1200" b="1">
                 <a:solidFill>
                   <a:srgbClr val="00875A"/>
                 </a:solidFill>
               </a:defRPr>
             </a:pPr>
             <a:r>
-              <a:t>✔  Auditoría Granular de Causales: </a:t>
-            </a:r>
-            <a:r>
-              <a:rPr b="0">
-                <a:solidFill>
-                  <a:srgbClr val="2C2A29"/>
-                </a:solidFill>
-              </a:rPr>
-              <a:t>Identificación independiente de errores en IVA, total, duplicados, ausencia contable y estado pendiente.</a:t>
+              <a:rPr dirty="0"/>
+              <a:t>✔  </a:t>
+            </a:r>
+            <a:r>
+              <a:rPr dirty="0" err="1"/>
+              <a:t>Auditoría</a:t>
+            </a:r>
+            <a:r>
+              <a:rPr dirty="0"/>
+              <a:t> Granular de </a:t>
+            </a:r>
+            <a:r>
+              <a:rPr dirty="0" err="1"/>
+              <a:t>Causales</a:t>
+            </a:r>
+            <a:r>
+              <a:rPr dirty="0"/>
+              <a:t>: </a:t>
+            </a:r>
+            <a:r>
+              <a:rPr b="0" dirty="0" err="1">
+                <a:solidFill>
+                  <a:srgbClr val="2C2A29"/>
+                </a:solidFill>
+              </a:rPr>
+              <a:t>Identificación</a:t>
+            </a:r>
+            <a:r>
+              <a:rPr b="0" dirty="0">
+                <a:solidFill>
+                  <a:srgbClr val="2C2A29"/>
+                </a:solidFill>
+              </a:rPr>
+              <a:t> </a:t>
+            </a:r>
+            <a:r>
+              <a:rPr b="0" dirty="0" err="1">
+                <a:solidFill>
+                  <a:srgbClr val="2C2A29"/>
+                </a:solidFill>
+              </a:rPr>
+              <a:t>independiente</a:t>
+            </a:r>
+            <a:r>
+              <a:rPr b="0" dirty="0">
+                <a:solidFill>
+                  <a:srgbClr val="2C2A29"/>
+                </a:solidFill>
+              </a:rPr>
+              <a:t> de </a:t>
+            </a:r>
+            <a:r>
+              <a:rPr b="0" dirty="0" err="1">
+                <a:solidFill>
+                  <a:srgbClr val="2C2A29"/>
+                </a:solidFill>
+              </a:rPr>
+              <a:t>errores</a:t>
+            </a:r>
+            <a:r>
+              <a:rPr b="0" dirty="0">
+                <a:solidFill>
+                  <a:srgbClr val="2C2A29"/>
+                </a:solidFill>
+              </a:rPr>
+              <a:t> </a:t>
+            </a:r>
+            <a:r>
+              <a:rPr b="0" dirty="0" err="1">
+                <a:solidFill>
+                  <a:srgbClr val="2C2A29"/>
+                </a:solidFill>
+              </a:rPr>
+              <a:t>en</a:t>
+            </a:r>
+            <a:r>
+              <a:rPr b="0" dirty="0">
+                <a:solidFill>
+                  <a:srgbClr val="2C2A29"/>
+                </a:solidFill>
+              </a:rPr>
+              <a:t> IVA, total, </a:t>
+            </a:r>
+            <a:r>
+              <a:rPr b="0" dirty="0" err="1">
+                <a:solidFill>
+                  <a:srgbClr val="2C2A29"/>
+                </a:solidFill>
+              </a:rPr>
+              <a:t>duplicados</a:t>
+            </a:r>
+            <a:r>
+              <a:rPr b="0" dirty="0">
+                <a:solidFill>
+                  <a:srgbClr val="2C2A29"/>
+                </a:solidFill>
+              </a:rPr>
+              <a:t>, </a:t>
+            </a:r>
+            <a:r>
+              <a:rPr b="0" dirty="0" err="1">
+                <a:solidFill>
+                  <a:srgbClr val="2C2A29"/>
+                </a:solidFill>
+              </a:rPr>
+              <a:t>ausencia</a:t>
+            </a:r>
+            <a:r>
+              <a:rPr b="0" dirty="0">
+                <a:solidFill>
+                  <a:srgbClr val="2C2A29"/>
+                </a:solidFill>
+              </a:rPr>
+              <a:t> </a:t>
+            </a:r>
+            <a:r>
+              <a:rPr b="0" dirty="0" err="1">
+                <a:solidFill>
+                  <a:srgbClr val="2C2A29"/>
+                </a:solidFill>
+              </a:rPr>
+              <a:t>contable</a:t>
+            </a:r>
+            <a:r>
+              <a:rPr b="0" dirty="0">
+                <a:solidFill>
+                  <a:srgbClr val="2C2A29"/>
+                </a:solidFill>
+              </a:rPr>
+              <a:t> y </a:t>
+            </a:r>
+            <a:r>
+              <a:rPr b="0" dirty="0" err="1">
+                <a:solidFill>
+                  <a:srgbClr val="2C2A29"/>
+                </a:solidFill>
+              </a:rPr>
+              <a:t>estado</a:t>
+            </a:r>
+            <a:r>
+              <a:rPr b="0" dirty="0">
+                <a:solidFill>
+                  <a:srgbClr val="2C2A29"/>
+                </a:solidFill>
+              </a:rPr>
+              <a:t> </a:t>
+            </a:r>
+            <a:r>
+              <a:rPr b="0" dirty="0" err="1">
+                <a:solidFill>
+                  <a:srgbClr val="2C2A29"/>
+                </a:solidFill>
+              </a:rPr>
+              <a:t>pendiente</a:t>
+            </a:r>
+            <a:r>
+              <a:rPr b="0" dirty="0">
+                <a:solidFill>
+                  <a:srgbClr val="2C2A29"/>
+                </a:solidFill>
+              </a:rPr>
+              <a:t>.</a:t>
             </a:r>
           </a:p>
           <a:p>
@@ -3858,22 +4356,167 @@
               <a:spcBef>
                 <a:spcPts val="800"/>
               </a:spcBef>
-              <a:defRPr b="1" sz="1200">
+              <a:defRPr sz="1200" b="1">
                 <a:solidFill>
                   <a:srgbClr val="00875A"/>
                 </a:solidFill>
               </a:defRPr>
             </a:pPr>
             <a:r>
-              <a:t>✔  Interfaz Intuitiva en Español: </a:t>
-            </a:r>
-            <a:r>
-              <a:rPr b="0">
-                <a:solidFill>
-                  <a:srgbClr val="2C2A29"/>
-                </a:solidFill>
-              </a:rPr>
-              <a:t>Panel interactivo adaptado para el analista tributario con filtros dinámicos y alertas cromáticas.</a:t>
+              <a:rPr dirty="0"/>
+              <a:t>✔  </a:t>
+            </a:r>
+            <a:r>
+              <a:rPr dirty="0" err="1"/>
+              <a:t>Interfaz</a:t>
+            </a:r>
+            <a:r>
+              <a:rPr dirty="0"/>
+              <a:t> </a:t>
+            </a:r>
+            <a:r>
+              <a:rPr dirty="0" err="1"/>
+              <a:t>Intuitiva</a:t>
+            </a:r>
+            <a:r>
+              <a:rPr dirty="0"/>
+              <a:t>: </a:t>
+            </a:r>
+            <a:r>
+              <a:rPr b="0" dirty="0">
+                <a:solidFill>
+                  <a:srgbClr val="2C2A29"/>
+                </a:solidFill>
+              </a:rPr>
+              <a:t>Panel </a:t>
+            </a:r>
+            <a:r>
+              <a:rPr b="0" dirty="0" err="1">
+                <a:solidFill>
+                  <a:srgbClr val="2C2A29"/>
+                </a:solidFill>
+              </a:rPr>
+              <a:t>interactivo</a:t>
+            </a:r>
+            <a:r>
+              <a:rPr b="0" dirty="0">
+                <a:solidFill>
+                  <a:srgbClr val="2C2A29"/>
+                </a:solidFill>
+              </a:rPr>
+              <a:t> </a:t>
+            </a:r>
+            <a:r>
+              <a:rPr b="0" dirty="0" err="1">
+                <a:solidFill>
+                  <a:srgbClr val="2C2A29"/>
+                </a:solidFill>
+              </a:rPr>
+              <a:t>adaptado</a:t>
+            </a:r>
+            <a:r>
+              <a:rPr b="0" dirty="0">
+                <a:solidFill>
+                  <a:srgbClr val="2C2A29"/>
+                </a:solidFill>
+              </a:rPr>
+              <a:t> para el </a:t>
+            </a:r>
+            <a:r>
+              <a:rPr b="0" dirty="0" err="1">
+                <a:solidFill>
+                  <a:srgbClr val="2C2A29"/>
+                </a:solidFill>
+              </a:rPr>
+              <a:t>analista</a:t>
+            </a:r>
+            <a:r>
+              <a:rPr b="0" dirty="0">
+                <a:solidFill>
+                  <a:srgbClr val="2C2A29"/>
+                </a:solidFill>
+              </a:rPr>
+              <a:t> </a:t>
+            </a:r>
+            <a:r>
+              <a:rPr b="0" dirty="0" err="1">
+                <a:solidFill>
+                  <a:srgbClr val="2C2A29"/>
+                </a:solidFill>
+              </a:rPr>
+              <a:t>tributario</a:t>
+            </a:r>
+            <a:r>
+              <a:rPr b="0" dirty="0">
+                <a:solidFill>
+                  <a:srgbClr val="2C2A29"/>
+                </a:solidFill>
+              </a:rPr>
+              <a:t> con </a:t>
+            </a:r>
+            <a:r>
+              <a:rPr b="0" dirty="0" err="1">
+                <a:solidFill>
+                  <a:srgbClr val="2C2A29"/>
+                </a:solidFill>
+              </a:rPr>
+              <a:t>filtros</a:t>
+            </a:r>
+            <a:r>
+              <a:rPr b="0" dirty="0">
+                <a:solidFill>
+                  <a:srgbClr val="2C2A29"/>
+                </a:solidFill>
+              </a:rPr>
+              <a:t> </a:t>
+            </a:r>
+            <a:r>
+              <a:rPr b="0" dirty="0" err="1">
+                <a:solidFill>
+                  <a:srgbClr val="2C2A29"/>
+                </a:solidFill>
+              </a:rPr>
+              <a:t>dinámicos</a:t>
+            </a:r>
+            <a:r>
+              <a:rPr b="0" dirty="0">
+                <a:solidFill>
+                  <a:srgbClr val="2C2A29"/>
+                </a:solidFill>
+              </a:rPr>
+              <a:t> y </a:t>
+            </a:r>
+            <a:r>
+              <a:rPr b="0" dirty="0" err="1">
+                <a:solidFill>
+                  <a:srgbClr val="2C2A29"/>
+                </a:solidFill>
+              </a:rPr>
+              <a:t>alertas</a:t>
+            </a:r>
+            <a:r>
+              <a:rPr b="0" dirty="0">
+                <a:solidFill>
+                  <a:srgbClr val="2C2A29"/>
+                </a:solidFill>
+              </a:rPr>
+              <a:t> </a:t>
+            </a:r>
+            <a:r>
+              <a:rPr b="0" dirty="0" err="1">
+                <a:solidFill>
+                  <a:srgbClr val="2C2A29"/>
+                </a:solidFill>
+              </a:rPr>
+              <a:t>cromáticas</a:t>
+            </a:r>
+            <a:r>
+              <a:rPr b="0" dirty="0">
+                <a:solidFill>
+                  <a:srgbClr val="2C2A29"/>
+                </a:solidFill>
+              </a:rPr>
+              <a:t>.</a:t>
             </a:r>
           </a:p>
         </p:txBody>
@@ -3887,7 +4530,7 @@
 </file>
 
 <file path=ppt/slides/slide3.xml><?xml version="1.0" encoding="utf-8"?>
-<p:sld xmlns:a="http://schemas.openxmlformats.org/drawingml/2006/main" xmlns:p="http://schemas.openxmlformats.org/presentationml/2006/main" xmlns:r="http://schemas.openxmlformats.org/officeDocument/2006/relationships">
+<p:sld xmlns:a="http://schemas.openxmlformats.org/drawingml/2006/main" xmlns:r="http://schemas.openxmlformats.org/officeDocument/2006/relationships" xmlns:p="http://schemas.openxmlformats.org/presentationml/2006/main">
   <p:cSld>
     <p:spTree>
       <p:nvGrpSpPr>
@@ -3895,7 +4538,14 @@
         <p:cNvGrpSpPr/>
         <p:nvPr/>
       </p:nvGrpSpPr>
-      <p:grpSpPr/>
+      <p:grpSpPr>
+        <a:xfrm>
+          <a:off x="0" y="0"/>
+          <a:ext cx="0" cy="0"/>
+          <a:chOff x="0" y="0"/>
+          <a:chExt cx="0" cy="0"/>
+        </a:xfrm>
+      </p:grpSpPr>
       <p:sp>
         <p:nvSpPr>
           <p:cNvPr id="2" name="Rectangle 1"/>
@@ -3936,6 +4586,7 @@
           <a:lstStyle/>
           <a:p>
             <a:pPr algn="ctr"/>
+            <a:endParaRPr/>
           </a:p>
         </p:txBody>
       </p:sp>
@@ -3979,6 +4630,7 @@
           <a:lstStyle/>
           <a:p>
             <a:pPr algn="ctr"/>
+            <a:endParaRPr/>
           </a:p>
         </p:txBody>
       </p:sp>
@@ -4022,6 +4674,7 @@
           <a:lstStyle/>
           <a:p>
             <a:pPr algn="ctr"/>
+            <a:endParaRPr/>
           </a:p>
         </p:txBody>
       </p:sp>
@@ -4149,6 +4802,7 @@
           <a:lstStyle/>
           <a:p>
             <a:pPr algn="ctr"/>
+            <a:endParaRPr/>
           </a:p>
         </p:txBody>
       </p:sp>
@@ -4213,7 +4867,7 @@
               <a:spcBef>
                 <a:spcPts val="0"/>
               </a:spcBef>
-              <a:defRPr b="1" sz="1100">
+              <a:defRPr sz="1100" b="1">
                 <a:solidFill>
                   <a:srgbClr val="2C2A29"/>
                 </a:solidFill>
@@ -4223,7 +4877,7 @@
               <a:t>• Arquitectura Standalone: </a:t>
             </a:r>
             <a:r>
-              <a:rPr b="0" sz="1100">
+              <a:rPr sz="1100" b="0">
                 <a:solidFill>
                   <a:srgbClr val="6B6B6B"/>
                 </a:solidFill>
@@ -4236,7 +4890,7 @@
               <a:spcBef>
                 <a:spcPts val="800"/>
               </a:spcBef>
-              <a:defRPr b="1" sz="1100">
+              <a:defRPr sz="1100" b="1">
                 <a:solidFill>
                   <a:srgbClr val="2C2A29"/>
                 </a:solidFill>
@@ -4246,7 +4900,7 @@
               <a:t>• Carga y Validación: </a:t>
             </a:r>
             <a:r>
-              <a:rPr b="0" sz="1100">
+              <a:rPr sz="1100" b="0">
                 <a:solidFill>
                   <a:srgbClr val="6B6B6B"/>
                 </a:solidFill>
@@ -4259,7 +4913,7 @@
               <a:spcBef>
                 <a:spcPts val="800"/>
               </a:spcBef>
-              <a:defRPr b="1" sz="1100">
+              <a:defRPr sz="1100" b="1">
                 <a:solidFill>
                   <a:srgbClr val="2C2A29"/>
                 </a:solidFill>
@@ -4269,7 +4923,7 @@
               <a:t>• Dashboard Ejecutivo: </a:t>
             </a:r>
             <a:r>
-              <a:rPr b="0" sz="1100">
+              <a:rPr sz="1100" b="0">
                 <a:solidFill>
                   <a:srgbClr val="6B6B6B"/>
                 </a:solidFill>
@@ -4282,7 +4936,7 @@
               <a:spcBef>
                 <a:spcPts val="800"/>
               </a:spcBef>
-              <a:defRPr b="1" sz="1100">
+              <a:defRPr sz="1100" b="1">
                 <a:solidFill>
                   <a:srgbClr val="2C2A29"/>
                 </a:solidFill>
@@ -4292,7 +4946,7 @@
               <a:t>• Diseño Corporativo: </a:t>
             </a:r>
             <a:r>
-              <a:rPr b="0" sz="1100">
+              <a:rPr sz="1100" b="0">
                 <a:solidFill>
                   <a:srgbClr val="6B6B6B"/>
                 </a:solidFill>
@@ -4344,6 +4998,7 @@
           <a:lstStyle/>
           <a:p>
             <a:pPr algn="ctr"/>
+            <a:endParaRPr/>
           </a:p>
         </p:txBody>
       </p:sp>
@@ -4408,7 +5063,7 @@
               <a:spcBef>
                 <a:spcPts val="0"/>
               </a:spcBef>
-              <a:defRPr b="1" sz="1100">
+              <a:defRPr sz="1100" b="1">
                 <a:solidFill>
                   <a:srgbClr val="2C2A29"/>
                 </a:solidFill>
@@ -4418,7 +5073,7 @@
               <a:t>• API REST Asíncrona: </a:t>
             </a:r>
             <a:r>
-              <a:rPr b="0" sz="1100">
+              <a:rPr sz="1100" b="0">
                 <a:solidFill>
                   <a:srgbClr val="6B6B6B"/>
                 </a:solidFill>
@@ -4431,7 +5086,7 @@
               <a:spcBef>
                 <a:spcPts val="800"/>
               </a:spcBef>
-              <a:defRPr b="1" sz="1100">
+              <a:defRPr sz="1100" b="1">
                 <a:solidFill>
                   <a:srgbClr val="2C2A29"/>
                 </a:solidFill>
@@ -4441,7 +5096,7 @@
               <a:t>• Servicio de Aplicación: </a:t>
             </a:r>
             <a:r>
-              <a:rPr b="0" sz="1100">
+              <a:rPr sz="1100" b="0">
                 <a:solidFill>
                   <a:srgbClr val="6B6B6B"/>
                 </a:solidFill>
@@ -4454,7 +5109,7 @@
               <a:spcBef>
                 <a:spcPts val="800"/>
               </a:spcBef>
-              <a:defRPr b="1" sz="1100">
+              <a:defRPr sz="1100" b="1">
                 <a:solidFill>
                   <a:srgbClr val="2C2A29"/>
                 </a:solidFill>
@@ -4464,7 +5119,7 @@
               <a:t>• Ingesta Resiliente: </a:t>
             </a:r>
             <a:r>
-              <a:rPr b="0" sz="1100">
+              <a:rPr sz="1100" b="0">
                 <a:solidFill>
                   <a:srgbClr val="6B6B6B"/>
                 </a:solidFill>
@@ -4477,7 +5132,7 @@
               <a:spcBef>
                 <a:spcPts val="800"/>
               </a:spcBef>
-              <a:defRPr b="1" sz="1100">
+              <a:defRPr sz="1100" b="1">
                 <a:solidFill>
                   <a:srgbClr val="2C2A29"/>
                 </a:solidFill>
@@ -4487,7 +5142,7 @@
               <a:t>• Observabilidad: </a:t>
             </a:r>
             <a:r>
-              <a:rPr b="0" sz="1100">
+              <a:rPr sz="1100" b="0">
                 <a:solidFill>
                   <a:srgbClr val="6B6B6B"/>
                 </a:solidFill>
@@ -4539,6 +5194,7 @@
           <a:lstStyle/>
           <a:p>
             <a:pPr algn="ctr"/>
+            <a:endParaRPr/>
           </a:p>
         </p:txBody>
       </p:sp>
@@ -4603,7 +5259,7 @@
               <a:spcBef>
                 <a:spcPts val="0"/>
               </a:spcBef>
-              <a:defRPr b="1" sz="1100">
+              <a:defRPr sz="1100" b="1">
                 <a:solidFill>
                   <a:srgbClr val="2C2A29"/>
                 </a:solidFill>
@@ -4613,7 +5269,7 @@
               <a:t>• Patrón de Reglas Modulares: </a:t>
             </a:r>
             <a:r>
-              <a:rPr b="0" sz="1100">
+              <a:rPr sz="1100" b="0">
                 <a:solidFill>
                   <a:srgbClr val="6B6B6B"/>
                 </a:solidFill>
@@ -4626,7 +5282,7 @@
               <a:spcBef>
                 <a:spcPts val="800"/>
               </a:spcBef>
-              <a:defRPr b="1" sz="1100">
+              <a:defRPr sz="1100" b="1">
                 <a:solidFill>
                   <a:srgbClr val="2C2A29"/>
                 </a:solidFill>
@@ -4636,7 +5292,7 @@
               <a:t>• Aritmética Exacta: </a:t>
             </a:r>
             <a:r>
-              <a:rPr b="0" sz="1100">
+              <a:rPr sz="1100" b="0">
                 <a:solidFill>
                   <a:srgbClr val="6B6B6B"/>
                 </a:solidFill>
@@ -4649,7 +5305,7 @@
               <a:spcBef>
                 <a:spcPts val="800"/>
               </a:spcBef>
-              <a:defRPr b="1" sz="1100">
+              <a:defRPr sz="1100" b="1">
                 <a:solidFill>
                   <a:srgbClr val="2C2A29"/>
                 </a:solidFill>
@@ -4659,7 +5315,7 @@
               <a:t>• No Propagación: </a:t>
             </a:r>
             <a:r>
-              <a:rPr b="0" sz="1100">
+              <a:rPr sz="1100" b="0">
                 <a:solidFill>
                   <a:srgbClr val="6B6B6B"/>
                 </a:solidFill>
@@ -4672,7 +5328,7 @@
               <a:spcBef>
                 <a:spcPts val="800"/>
               </a:spcBef>
-              <a:defRPr b="1" sz="1100">
+              <a:defRPr sz="1100" b="1">
                 <a:solidFill>
                   <a:srgbClr val="2C2A29"/>
                 </a:solidFill>
@@ -4682,7 +5338,7 @@
               <a:t>• Batería de Pruebas: </a:t>
             </a:r>
             <a:r>
-              <a:rPr b="0" sz="1100">
+              <a:rPr sz="1100" b="0">
                 <a:solidFill>
                   <a:srgbClr val="6B6B6B"/>
                 </a:solidFill>
@@ -4701,7 +5357,7 @@
 </file>
 
 <file path=ppt/slides/slide4.xml><?xml version="1.0" encoding="utf-8"?>
-<p:sld xmlns:a="http://schemas.openxmlformats.org/drawingml/2006/main" xmlns:p="http://schemas.openxmlformats.org/presentationml/2006/main" xmlns:r="http://schemas.openxmlformats.org/officeDocument/2006/relationships">
+<p:sld xmlns:a="http://schemas.openxmlformats.org/drawingml/2006/main" xmlns:r="http://schemas.openxmlformats.org/officeDocument/2006/relationships" xmlns:p="http://schemas.openxmlformats.org/presentationml/2006/main">
   <p:cSld>
     <p:spTree>
       <p:nvGrpSpPr>
@@ -4709,7 +5365,14 @@
         <p:cNvGrpSpPr/>
         <p:nvPr/>
       </p:nvGrpSpPr>
-      <p:grpSpPr/>
+      <p:grpSpPr>
+        <a:xfrm>
+          <a:off x="0" y="0"/>
+          <a:ext cx="0" cy="0"/>
+          <a:chOff x="0" y="0"/>
+          <a:chExt cx="0" cy="0"/>
+        </a:xfrm>
+      </p:grpSpPr>
       <p:sp>
         <p:nvSpPr>
           <p:cNvPr id="2" name="Rectangle 1"/>
@@ -4750,6 +5413,7 @@
           <a:lstStyle/>
           <a:p>
             <a:pPr algn="ctr"/>
+            <a:endParaRPr/>
           </a:p>
         </p:txBody>
       </p:sp>
@@ -4793,6 +5457,7 @@
           <a:lstStyle/>
           <a:p>
             <a:pPr algn="ctr"/>
+            <a:endParaRPr/>
           </a:p>
         </p:txBody>
       </p:sp>
@@ -4836,6 +5501,7 @@
           <a:lstStyle/>
           <a:p>
             <a:pPr algn="ctr"/>
+            <a:endParaRPr/>
           </a:p>
         </p:txBody>
       </p:sp>
@@ -4940,9 +5606,27 @@
                 <a:tableStyleId>{5C22544A-7EE6-4342-B048-85BDC9FD1C3A}</a:tableStyleId>
               </a:tblPr>
               <a:tblGrid>
-                <a:gridCol w="2560320"/>
-                <a:gridCol w="3566160"/>
-                <a:gridCol w="4572000"/>
+                <a:gridCol w="2560320">
+                  <a:extLst>
+                    <a:ext uri="{9D8B030D-6E8A-4147-A177-3AD203B41FA5}">
+                      <a16:colId xmlns:a16="http://schemas.microsoft.com/office/drawing/2014/main" val="20000"/>
+                    </a:ext>
+                  </a:extLst>
+                </a:gridCol>
+                <a:gridCol w="3566160">
+                  <a:extLst>
+                    <a:ext uri="{9D8B030D-6E8A-4147-A177-3AD203B41FA5}">
+                      <a16:colId xmlns:a16="http://schemas.microsoft.com/office/drawing/2014/main" val="20001"/>
+                    </a:ext>
+                  </a:extLst>
+                </a:gridCol>
+                <a:gridCol w="4572000">
+                  <a:extLst>
+                    <a:ext uri="{9D8B030D-6E8A-4147-A177-3AD203B41FA5}">
+                      <a16:colId xmlns:a16="http://schemas.microsoft.com/office/drawing/2014/main" val="20002"/>
+                    </a:ext>
+                  </a:extLst>
+                </a:gridCol>
               </a:tblGrid>
               <a:tr h="746760">
                 <a:tc>
@@ -4951,7 +5635,7 @@
                     <a:lstStyle/>
                     <a:p>
                       <a:pPr>
-                        <a:defRPr b="1" sz="1200">
+                        <a:defRPr sz="1200" b="1">
                           <a:solidFill>
                             <a:srgbClr val="FDDA24"/>
                           </a:solidFill>
@@ -4974,7 +5658,7 @@
                     <a:lstStyle/>
                     <a:p>
                       <a:pPr>
-                        <a:defRPr b="1" sz="1200">
+                        <a:defRPr sz="1200" b="1">
                           <a:solidFill>
                             <a:srgbClr val="FDDA24"/>
                           </a:solidFill>
@@ -4997,7 +5681,7 @@
                     <a:lstStyle/>
                     <a:p>
                       <a:pPr>
-                        <a:defRPr b="1" sz="1200">
+                        <a:defRPr sz="1200" b="1">
                           <a:solidFill>
                             <a:srgbClr val="FDDA24"/>
                           </a:solidFill>
@@ -5014,6 +5698,11 @@
                     </a:solidFill>
                   </a:tcPr>
                 </a:tc>
+                <a:extLst>
+                  <a:ext uri="{0D108BD9-81ED-4DB2-BD59-A6C34878D82A}">
+                    <a16:rowId xmlns:a16="http://schemas.microsoft.com/office/drawing/2014/main" val="10000"/>
+                  </a:ext>
+                </a:extLst>
               </a:tr>
               <a:tr h="746760">
                 <a:tc>
@@ -5089,6 +5778,11 @@
                     </a:solidFill>
                   </a:tcPr>
                 </a:tc>
+                <a:extLst>
+                  <a:ext uri="{0D108BD9-81ED-4DB2-BD59-A6C34878D82A}">
+                    <a16:rowId xmlns:a16="http://schemas.microsoft.com/office/drawing/2014/main" val="10001"/>
+                  </a:ext>
+                </a:extLst>
               </a:tr>
               <a:tr h="746760">
                 <a:tc>
@@ -5164,6 +5858,11 @@
                     </a:solidFill>
                   </a:tcPr>
                 </a:tc>
+                <a:extLst>
+                  <a:ext uri="{0D108BD9-81ED-4DB2-BD59-A6C34878D82A}">
+                    <a16:rowId xmlns:a16="http://schemas.microsoft.com/office/drawing/2014/main" val="10002"/>
+                  </a:ext>
+                </a:extLst>
               </a:tr>
               <a:tr h="746760">
                 <a:tc>
@@ -5239,6 +5938,11 @@
                     </a:solidFill>
                   </a:tcPr>
                 </a:tc>
+                <a:extLst>
+                  <a:ext uri="{0D108BD9-81ED-4DB2-BD59-A6C34878D82A}">
+                    <a16:rowId xmlns:a16="http://schemas.microsoft.com/office/drawing/2014/main" val="10003"/>
+                  </a:ext>
+                </a:extLst>
               </a:tr>
               <a:tr h="746760">
                 <a:tc>
@@ -5314,6 +6018,11 @@
                     </a:solidFill>
                   </a:tcPr>
                 </a:tc>
+                <a:extLst>
+                  <a:ext uri="{0D108BD9-81ED-4DB2-BD59-A6C34878D82A}">
+                    <a16:rowId xmlns:a16="http://schemas.microsoft.com/office/drawing/2014/main" val="10004"/>
+                  </a:ext>
+                </a:extLst>
               </a:tr>
               <a:tr h="746760">
                 <a:tc>
@@ -5385,6 +6094,11 @@
                     </a:solidFill>
                   </a:tcPr>
                 </a:tc>
+                <a:extLst>
+                  <a:ext uri="{0D108BD9-81ED-4DB2-BD59-A6C34878D82A}">
+                    <a16:rowId xmlns:a16="http://schemas.microsoft.com/office/drawing/2014/main" val="10005"/>
+                  </a:ext>
+                </a:extLst>
               </a:tr>
             </a:tbl>
           </a:graphicData>
@@ -5399,7 +6113,7 @@
 </file>
 
 <file path=ppt/slides/slide5.xml><?xml version="1.0" encoding="utf-8"?>
-<p:sld xmlns:a="http://schemas.openxmlformats.org/drawingml/2006/main" xmlns:p="http://schemas.openxmlformats.org/presentationml/2006/main" xmlns:r="http://schemas.openxmlformats.org/officeDocument/2006/relationships">
+<p:sld xmlns:a="http://schemas.openxmlformats.org/drawingml/2006/main" xmlns:r="http://schemas.openxmlformats.org/officeDocument/2006/relationships" xmlns:p="http://schemas.openxmlformats.org/presentationml/2006/main">
   <p:cSld>
     <p:spTree>
       <p:nvGrpSpPr>
@@ -5407,7 +6121,14 @@
         <p:cNvGrpSpPr/>
         <p:nvPr/>
       </p:nvGrpSpPr>
-      <p:grpSpPr/>
+      <p:grpSpPr>
+        <a:xfrm>
+          <a:off x="0" y="0"/>
+          <a:ext cx="0" cy="0"/>
+          <a:chOff x="0" y="0"/>
+          <a:chExt cx="0" cy="0"/>
+        </a:xfrm>
+      </p:grpSpPr>
       <p:sp>
         <p:nvSpPr>
           <p:cNvPr id="2" name="Rectangle 1"/>
@@ -5448,6 +6169,7 @@
           <a:lstStyle/>
           <a:p>
             <a:pPr algn="ctr"/>
+            <a:endParaRPr/>
           </a:p>
         </p:txBody>
       </p:sp>
@@ -5491,6 +6213,7 @@
           <a:lstStyle/>
           <a:p>
             <a:pPr algn="ctr"/>
+            <a:endParaRPr/>
           </a:p>
         </p:txBody>
       </p:sp>
@@ -5534,6 +6257,7 @@
           <a:lstStyle/>
           <a:p>
             <a:pPr algn="ctr"/>
+            <a:endParaRPr/>
           </a:p>
         </p:txBody>
       </p:sp>
@@ -5661,6 +6385,7 @@
           <a:lstStyle/>
           <a:p>
             <a:pPr algn="ctr"/>
+            <a:endParaRPr/>
           </a:p>
         </p:txBody>
       </p:sp>
@@ -5687,7 +6412,7 @@
           <a:lstStyle/>
           <a:p>
             <a:pPr>
-              <a:defRPr b="1" sz="1800">
+              <a:defRPr sz="1800" b="1">
                 <a:solidFill>
                   <a:srgbClr val="FDDA24"/>
                 </a:solidFill>
@@ -5753,6 +6478,7 @@
           <a:lstStyle/>
           <a:p>
             <a:pPr algn="ctr"/>
+            <a:endParaRPr/>
           </a:p>
         </p:txBody>
       </p:sp>
@@ -5779,7 +6505,7 @@
           <a:lstStyle/>
           <a:p>
             <a:pPr>
-              <a:defRPr b="1" sz="1800">
+              <a:defRPr sz="1800" b="1">
                 <a:solidFill>
                   <a:srgbClr val="00875A"/>
                 </a:solidFill>
@@ -5845,6 +6571,7 @@
           <a:lstStyle/>
           <a:p>
             <a:pPr algn="ctr"/>
+            <a:endParaRPr/>
           </a:p>
         </p:txBody>
       </p:sp>
@@ -5871,7 +6598,7 @@
           <a:lstStyle/>
           <a:p>
             <a:pPr>
-              <a:defRPr b="1" sz="1800">
+              <a:defRPr sz="1800" b="1">
                 <a:solidFill>
                   <a:srgbClr val="C8102E"/>
                 </a:solidFill>
@@ -5914,9 +6641,27 @@
                 <a:tableStyleId>{5C22544A-7EE6-4342-B048-85BDC9FD1C3A}</a:tableStyleId>
               </a:tblPr>
               <a:tblGrid>
-                <a:gridCol w="2926080"/>
-                <a:gridCol w="1371600"/>
-                <a:gridCol w="6400800"/>
+                <a:gridCol w="2926080">
+                  <a:extLst>
+                    <a:ext uri="{9D8B030D-6E8A-4147-A177-3AD203B41FA5}">
+                      <a16:colId xmlns:a16="http://schemas.microsoft.com/office/drawing/2014/main" val="20000"/>
+                    </a:ext>
+                  </a:extLst>
+                </a:gridCol>
+                <a:gridCol w="1371600">
+                  <a:extLst>
+                    <a:ext uri="{9D8B030D-6E8A-4147-A177-3AD203B41FA5}">
+                      <a16:colId xmlns:a16="http://schemas.microsoft.com/office/drawing/2014/main" val="20001"/>
+                    </a:ext>
+                  </a:extLst>
+                </a:gridCol>
+                <a:gridCol w="6400800">
+                  <a:extLst>
+                    <a:ext uri="{9D8B030D-6E8A-4147-A177-3AD203B41FA5}">
+                      <a16:colId xmlns:a16="http://schemas.microsoft.com/office/drawing/2014/main" val="20002"/>
+                    </a:ext>
+                  </a:extLst>
+                </a:gridCol>
               </a:tblGrid>
               <a:tr h="470262">
                 <a:tc>
@@ -5925,7 +6670,7 @@
                     <a:lstStyle/>
                     <a:p>
                       <a:pPr>
-                        <a:defRPr b="1" sz="1100">
+                        <a:defRPr sz="1100" b="1">
                           <a:solidFill>
                             <a:srgbClr val="FDDA24"/>
                           </a:solidFill>
@@ -5948,7 +6693,7 @@
                     <a:lstStyle/>
                     <a:p>
                       <a:pPr>
-                        <a:defRPr b="1" sz="1100">
+                        <a:defRPr sz="1100" b="1">
                           <a:solidFill>
                             <a:srgbClr val="FDDA24"/>
                           </a:solidFill>
@@ -5971,7 +6716,7 @@
                     <a:lstStyle/>
                     <a:p>
                       <a:pPr>
-                        <a:defRPr b="1" sz="1100">
+                        <a:defRPr sz="1100" b="1">
                           <a:solidFill>
                             <a:srgbClr val="FDDA24"/>
                           </a:solidFill>
@@ -5988,6 +6733,11 @@
                     </a:solidFill>
                   </a:tcPr>
                 </a:tc>
+                <a:extLst>
+                  <a:ext uri="{0D108BD9-81ED-4DB2-BD59-A6C34878D82A}">
+                    <a16:rowId xmlns:a16="http://schemas.microsoft.com/office/drawing/2014/main" val="10000"/>
+                  </a:ext>
+                </a:extLst>
               </a:tr>
               <a:tr h="470262">
                 <a:tc>
@@ -6059,6 +6809,11 @@
                     </a:solidFill>
                   </a:tcPr>
                 </a:tc>
+                <a:extLst>
+                  <a:ext uri="{0D108BD9-81ED-4DB2-BD59-A6C34878D82A}">
+                    <a16:rowId xmlns:a16="http://schemas.microsoft.com/office/drawing/2014/main" val="10001"/>
+                  </a:ext>
+                </a:extLst>
               </a:tr>
               <a:tr h="470262">
                 <a:tc>
@@ -6130,6 +6885,11 @@
                     </a:solidFill>
                   </a:tcPr>
                 </a:tc>
+                <a:extLst>
+                  <a:ext uri="{0D108BD9-81ED-4DB2-BD59-A6C34878D82A}">
+                    <a16:rowId xmlns:a16="http://schemas.microsoft.com/office/drawing/2014/main" val="10002"/>
+                  </a:ext>
+                </a:extLst>
               </a:tr>
               <a:tr h="470262">
                 <a:tc>
@@ -6201,6 +6961,11 @@
                     </a:solidFill>
                   </a:tcPr>
                 </a:tc>
+                <a:extLst>
+                  <a:ext uri="{0D108BD9-81ED-4DB2-BD59-A6C34878D82A}">
+                    <a16:rowId xmlns:a16="http://schemas.microsoft.com/office/drawing/2014/main" val="10003"/>
+                  </a:ext>
+                </a:extLst>
               </a:tr>
               <a:tr h="470262">
                 <a:tc>
@@ -6272,6 +7037,11 @@
                     </a:solidFill>
                   </a:tcPr>
                 </a:tc>
+                <a:extLst>
+                  <a:ext uri="{0D108BD9-81ED-4DB2-BD59-A6C34878D82A}">
+                    <a16:rowId xmlns:a16="http://schemas.microsoft.com/office/drawing/2014/main" val="10004"/>
+                  </a:ext>
+                </a:extLst>
               </a:tr>
               <a:tr h="470262">
                 <a:tc>
@@ -6343,6 +7113,11 @@
                     </a:solidFill>
                   </a:tcPr>
                 </a:tc>
+                <a:extLst>
+                  <a:ext uri="{0D108BD9-81ED-4DB2-BD59-A6C34878D82A}">
+                    <a16:rowId xmlns:a16="http://schemas.microsoft.com/office/drawing/2014/main" val="10005"/>
+                  </a:ext>
+                </a:extLst>
               </a:tr>
               <a:tr h="470268">
                 <a:tc>
@@ -6414,6 +7189,11 @@
                     </a:solidFill>
                   </a:tcPr>
                 </a:tc>
+                <a:extLst>
+                  <a:ext uri="{0D108BD9-81ED-4DB2-BD59-A6C34878D82A}">
+                    <a16:rowId xmlns:a16="http://schemas.microsoft.com/office/drawing/2014/main" val="10006"/>
+                  </a:ext>
+                </a:extLst>
               </a:tr>
             </a:tbl>
           </a:graphicData>
@@ -6463,7 +7243,7 @@
 </file>
 
 <file path=ppt/slides/slide6.xml><?xml version="1.0" encoding="utf-8"?>
-<p:sld xmlns:a="http://schemas.openxmlformats.org/drawingml/2006/main" xmlns:p="http://schemas.openxmlformats.org/presentationml/2006/main" xmlns:r="http://schemas.openxmlformats.org/officeDocument/2006/relationships">
+<p:sld xmlns:a="http://schemas.openxmlformats.org/drawingml/2006/main" xmlns:r="http://schemas.openxmlformats.org/officeDocument/2006/relationships" xmlns:p="http://schemas.openxmlformats.org/presentationml/2006/main">
   <p:cSld>
     <p:spTree>
       <p:nvGrpSpPr>
@@ -6471,7 +7251,14 @@
         <p:cNvGrpSpPr/>
         <p:nvPr/>
       </p:nvGrpSpPr>
-      <p:grpSpPr/>
+      <p:grpSpPr>
+        <a:xfrm>
+          <a:off x="0" y="0"/>
+          <a:ext cx="0" cy="0"/>
+          <a:chOff x="0" y="0"/>
+          <a:chExt cx="0" cy="0"/>
+        </a:xfrm>
+      </p:grpSpPr>
       <p:sp>
         <p:nvSpPr>
           <p:cNvPr id="2" name="Rectangle 1"/>
@@ -6512,6 +7299,7 @@
           <a:lstStyle/>
           <a:p>
             <a:pPr algn="ctr"/>
+            <a:endParaRPr/>
           </a:p>
         </p:txBody>
       </p:sp>
@@ -6555,6 +7343,7 @@
           <a:lstStyle/>
           <a:p>
             <a:pPr algn="ctr"/>
+            <a:endParaRPr/>
           </a:p>
         </p:txBody>
       </p:sp>
@@ -6598,6 +7387,7 @@
           <a:lstStyle/>
           <a:p>
             <a:pPr algn="ctr"/>
+            <a:endParaRPr/>
           </a:p>
         </p:txBody>
       </p:sp>
@@ -6725,6 +7515,7 @@
           <a:lstStyle/>
           <a:p>
             <a:pPr algn="ctr"/>
+            <a:endParaRPr/>
           </a:p>
         </p:txBody>
       </p:sp>
@@ -6789,7 +7580,7 @@
               <a:spcBef>
                 <a:spcPts val="0"/>
               </a:spcBef>
-              <a:defRPr b="1" sz="1200">
+              <a:defRPr sz="1200" b="1">
                 <a:solidFill>
                   <a:srgbClr val="00875A"/>
                 </a:solidFill>
@@ -6812,7 +7603,7 @@
               <a:spcBef>
                 <a:spcPts val="800"/>
               </a:spcBef>
-              <a:defRPr b="1" sz="1200">
+              <a:defRPr sz="1200" b="1">
                 <a:solidFill>
                   <a:srgbClr val="00875A"/>
                 </a:solidFill>
@@ -6835,7 +7626,7 @@
               <a:spcBef>
                 <a:spcPts val="800"/>
               </a:spcBef>
-              <a:defRPr b="1" sz="1200">
+              <a:defRPr sz="1200" b="1">
                 <a:solidFill>
                   <a:srgbClr val="00875A"/>
                 </a:solidFill>
@@ -6858,7 +7649,7 @@
               <a:spcBef>
                 <a:spcPts val="800"/>
               </a:spcBef>
-              <a:defRPr b="1" sz="1200">
+              <a:defRPr sz="1200" b="1">
                 <a:solidFill>
                   <a:srgbClr val="00875A"/>
                 </a:solidFill>
@@ -6920,6 +7711,7 @@
           <a:lstStyle/>
           <a:p>
             <a:pPr algn="ctr"/>
+            <a:endParaRPr/>
           </a:p>
         </p:txBody>
       </p:sp>
@@ -6984,7 +7776,7 @@
               <a:spcBef>
                 <a:spcPts val="0"/>
               </a:spcBef>
-              <a:defRPr b="1" sz="1200">
+              <a:defRPr sz="1200" b="1">
                 <a:solidFill>
                   <a:srgbClr val="2C2A29"/>
                 </a:solidFill>
@@ -7007,7 +7799,7 @@
               <a:spcBef>
                 <a:spcPts val="800"/>
               </a:spcBef>
-              <a:defRPr b="1" sz="1200">
+              <a:defRPr sz="1200" b="1">
                 <a:solidFill>
                   <a:srgbClr val="2C2A29"/>
                 </a:solidFill>
@@ -7030,7 +7822,7 @@
               <a:spcBef>
                 <a:spcPts val="800"/>
               </a:spcBef>
-              <a:defRPr b="1" sz="1200">
+              <a:defRPr sz="1200" b="1">
                 <a:solidFill>
                   <a:srgbClr val="2C2A29"/>
                 </a:solidFill>
@@ -7053,7 +7845,7 @@
               <a:spcBef>
                 <a:spcPts val="800"/>
               </a:spcBef>
-              <a:defRPr b="1" sz="1200">
+              <a:defRPr sz="1200" b="1">
                 <a:solidFill>
                   <a:srgbClr val="2C2A29"/>
                 </a:solidFill>
